--- a/chapter3/parts/part-06-bias-and-fairness/clip.pptx
+++ b/chapter3/parts/part-06-bias-and-fairness/clip.pptx
@@ -4313,7 +4313,7 @@
               </a:defRPr>
             </a:pPr>
             <a:r>
-              <a:t>Chapter 3 — 06 Bias And Fairness</a:t>
+              <a:t>Chapter 3 — Bias And Fairness</a:t>
             </a:r>
           </a:p>
         </p:txBody>
@@ -4492,7 +4492,7 @@
               </a:defRPr>
             </a:pPr>
             <a:r>
-              <a:t>Chapter 3 — 06 Bias And Fairness</a:t>
+              <a:t>Chapter 3 — Bias And Fairness</a:t>
             </a:r>
           </a:p>
         </p:txBody>
@@ -4651,7 +4651,7 @@
               </a:defRPr>
             </a:pPr>
             <a:r>
-              <a:t>Chapter 3 — 06 Bias And Fairness</a:t>
+              <a:t>Chapter 3 — Bias And Fairness</a:t>
             </a:r>
           </a:p>
         </p:txBody>
@@ -4810,7 +4810,7 @@
               </a:defRPr>
             </a:pPr>
             <a:r>
-              <a:t>Chapter 3 — 06 Bias And Fairness</a:t>
+              <a:t>Chapter 3 — Bias And Fairness</a:t>
             </a:r>
           </a:p>
         </p:txBody>
@@ -4989,7 +4989,7 @@
               </a:defRPr>
             </a:pPr>
             <a:r>
-              <a:t>Chapter 3 — 06 Bias And Fairness</a:t>
+              <a:t>Chapter 3 — Bias And Fairness</a:t>
             </a:r>
           </a:p>
         </p:txBody>
@@ -5188,7 +5188,7 @@
               </a:defRPr>
             </a:pPr>
             <a:r>
-              <a:t>Chapter 3 — 06 Bias And Fairness</a:t>
+              <a:t>Chapter 3 — Bias And Fairness</a:t>
             </a:r>
           </a:p>
         </p:txBody>
@@ -5367,7 +5367,7 @@
               </a:defRPr>
             </a:pPr>
             <a:r>
-              <a:t>Chapter 3 — 06 Bias And Fairness</a:t>
+              <a:t>Chapter 3 — Bias And Fairness</a:t>
             </a:r>
           </a:p>
         </p:txBody>
@@ -5566,7 +5566,7 @@
               </a:defRPr>
             </a:pPr>
             <a:r>
-              <a:t>Chapter 3 — 06 Bias And Fairness</a:t>
+              <a:t>Chapter 3 — Bias And Fairness</a:t>
             </a:r>
           </a:p>
         </p:txBody>
@@ -5725,7 +5725,7 @@
               </a:defRPr>
             </a:pPr>
             <a:r>
-              <a:t>Chapter 3 — 06 Bias And Fairness</a:t>
+              <a:t>Chapter 3 — Bias And Fairness</a:t>
             </a:r>
           </a:p>
         </p:txBody>
@@ -5904,7 +5904,7 @@
               </a:defRPr>
             </a:pPr>
             <a:r>
-              <a:t>Chapter 3 — 06 Bias And Fairness</a:t>
+              <a:t>Chapter 3 — Bias And Fairness</a:t>
             </a:r>
           </a:p>
         </p:txBody>
@@ -6063,7 +6063,7 @@
               </a:defRPr>
             </a:pPr>
             <a:r>
-              <a:t>Chapter 3 — 06 Bias And Fairness</a:t>
+              <a:t>Chapter 3 — Bias And Fairness</a:t>
             </a:r>
           </a:p>
         </p:txBody>

--- a/chapter3/parts/part-06-bias-and-fairness/clip.pptx
+++ b/chapter3/parts/part-06-bias-and-fairness/clip.pptx
@@ -4397,10 +4397,12 @@
           </a:bodyPr>
           <a:lstStyle/>
           <a:p>
-            <a:pPr>
+            <a:pPr lvl="0" marL="457200" indent="-228600">
+              <a:buFont typeface="Calibri"/>
               <a:spcAft>
                 <a:spcPts val="1000"/>
               </a:spcAft>
+              <a:buSzPct val="100000"/>
               <a:buChar char="•"/>
               <a:lnSpc>
                 <a:spcPts val="2200"/>
@@ -4417,10 +4419,12 @@
             </a:r>
           </a:p>
           <a:p>
-            <a:pPr>
+            <a:pPr lvl="0" marL="457200" indent="-228600">
+              <a:buFont typeface="Calibri"/>
               <a:spcAft>
                 <a:spcPts val="1000"/>
               </a:spcAft>
+              <a:buSzPct val="100000"/>
               <a:buChar char="•"/>
               <a:lnSpc>
                 <a:spcPts val="2200"/>
@@ -4437,10 +4441,12 @@
             </a:r>
           </a:p>
           <a:p>
-            <a:pPr>
+            <a:pPr lvl="0" marL="457200" indent="-228600">
+              <a:buFont typeface="Calibri"/>
               <a:spcAft>
                 <a:spcPts val="1000"/>
               </a:spcAft>
+              <a:buSzPct val="100000"/>
               <a:buChar char="•"/>
               <a:lnSpc>
                 <a:spcPts val="2200"/>
@@ -4576,10 +4582,12 @@
           </a:bodyPr>
           <a:lstStyle/>
           <a:p>
-            <a:pPr>
+            <a:pPr lvl="0" marL="457200" indent="-228600">
+              <a:buFont typeface="Calibri"/>
               <a:spcAft>
                 <a:spcPts val="1000"/>
               </a:spcAft>
+              <a:buSzPct val="100000"/>
               <a:buChar char="•"/>
               <a:lnSpc>
                 <a:spcPts val="2200"/>
@@ -4596,10 +4604,12 @@
             </a:r>
           </a:p>
           <a:p>
-            <a:pPr>
+            <a:pPr lvl="0" marL="457200" indent="-228600">
+              <a:buFont typeface="Calibri"/>
               <a:spcAft>
                 <a:spcPts val="1000"/>
               </a:spcAft>
+              <a:buSzPct val="100000"/>
               <a:buChar char="•"/>
               <a:lnSpc>
                 <a:spcPts val="2200"/>
@@ -4735,10 +4745,12 @@
           </a:bodyPr>
           <a:lstStyle/>
           <a:p>
-            <a:pPr>
+            <a:pPr lvl="0" marL="457200" indent="-228600">
+              <a:buFont typeface="Calibri"/>
               <a:spcAft>
                 <a:spcPts val="1000"/>
               </a:spcAft>
+              <a:buSzPct val="100000"/>
               <a:buChar char="•"/>
               <a:lnSpc>
                 <a:spcPts val="2200"/>
@@ -4755,10 +4767,12 @@
             </a:r>
           </a:p>
           <a:p>
-            <a:pPr>
+            <a:pPr lvl="0" marL="457200" indent="-228600">
+              <a:buFont typeface="Calibri"/>
               <a:spcAft>
                 <a:spcPts val="1000"/>
               </a:spcAft>
+              <a:buSzPct val="100000"/>
               <a:buChar char="•"/>
               <a:lnSpc>
                 <a:spcPts val="2200"/>
@@ -4894,10 +4908,12 @@
           </a:bodyPr>
           <a:lstStyle/>
           <a:p>
-            <a:pPr>
+            <a:pPr lvl="0" marL="457200" indent="-228600">
+              <a:buFont typeface="Calibri"/>
               <a:spcAft>
                 <a:spcPts val="1000"/>
               </a:spcAft>
+              <a:buSzPct val="100000"/>
               <a:buChar char="•"/>
               <a:lnSpc>
                 <a:spcPts val="2200"/>
@@ -4914,10 +4930,12 @@
             </a:r>
           </a:p>
           <a:p>
-            <a:pPr>
+            <a:pPr lvl="0" marL="457200" indent="-228600">
+              <a:buFont typeface="Calibri"/>
               <a:spcAft>
                 <a:spcPts val="1000"/>
               </a:spcAft>
+              <a:buSzPct val="100000"/>
               <a:buChar char="•"/>
               <a:lnSpc>
                 <a:spcPts val="2200"/>
@@ -4934,10 +4952,12 @@
             </a:r>
           </a:p>
           <a:p>
-            <a:pPr>
+            <a:pPr lvl="0" marL="457200" indent="-228600">
+              <a:buFont typeface="Calibri"/>
               <a:spcAft>
                 <a:spcPts val="1000"/>
               </a:spcAft>
+              <a:buSzPct val="100000"/>
               <a:buChar char="•"/>
               <a:lnSpc>
                 <a:spcPts val="2200"/>
@@ -5073,10 +5093,12 @@
           </a:bodyPr>
           <a:lstStyle/>
           <a:p>
-            <a:pPr>
+            <a:pPr lvl="0" marL="457200" indent="-228600">
+              <a:buFont typeface="Calibri"/>
               <a:spcAft>
                 <a:spcPts val="1000"/>
               </a:spcAft>
+              <a:buSzPct val="100000"/>
               <a:buChar char="•"/>
               <a:lnSpc>
                 <a:spcPts val="2200"/>
@@ -5093,10 +5115,12 @@
             </a:r>
           </a:p>
           <a:p>
-            <a:pPr>
+            <a:pPr lvl="0" marL="457200" indent="-228600">
+              <a:buFont typeface="Calibri"/>
               <a:spcAft>
                 <a:spcPts val="1000"/>
               </a:spcAft>
+              <a:buSzPct val="100000"/>
               <a:buChar char="•"/>
               <a:lnSpc>
                 <a:spcPts val="2200"/>
@@ -5113,10 +5137,12 @@
             </a:r>
           </a:p>
           <a:p>
-            <a:pPr>
+            <a:pPr lvl="0" marL="457200" indent="-228600">
+              <a:buFont typeface="Calibri"/>
               <a:spcAft>
                 <a:spcPts val="1000"/>
               </a:spcAft>
+              <a:buSzPct val="100000"/>
               <a:buChar char="•"/>
               <a:lnSpc>
                 <a:spcPts val="2200"/>
@@ -5133,10 +5159,12 @@
             </a:r>
           </a:p>
           <a:p>
-            <a:pPr>
+            <a:pPr lvl="0" marL="457200" indent="-228600">
+              <a:buFont typeface="Calibri"/>
               <a:spcAft>
                 <a:spcPts val="1000"/>
               </a:spcAft>
+              <a:buSzPct val="100000"/>
               <a:buChar char="•"/>
               <a:lnSpc>
                 <a:spcPts val="2200"/>
@@ -5272,10 +5300,12 @@
           </a:bodyPr>
           <a:lstStyle/>
           <a:p>
-            <a:pPr>
+            <a:pPr lvl="0" marL="457200" indent="-228600">
+              <a:buFont typeface="Calibri"/>
               <a:spcAft>
                 <a:spcPts val="1000"/>
               </a:spcAft>
+              <a:buSzPct val="100000"/>
               <a:buChar char="•"/>
               <a:lnSpc>
                 <a:spcPts val="2200"/>
@@ -5292,10 +5322,12 @@
             </a:r>
           </a:p>
           <a:p>
-            <a:pPr>
+            <a:pPr lvl="0" marL="457200" indent="-228600">
+              <a:buFont typeface="Calibri"/>
               <a:spcAft>
                 <a:spcPts val="1000"/>
               </a:spcAft>
+              <a:buSzPct val="100000"/>
               <a:buChar char="•"/>
               <a:lnSpc>
                 <a:spcPts val="2200"/>
@@ -5312,10 +5344,12 @@
             </a:r>
           </a:p>
           <a:p>
-            <a:pPr>
+            <a:pPr lvl="0" marL="457200" indent="-228600">
+              <a:buFont typeface="Calibri"/>
               <a:spcAft>
                 <a:spcPts val="1000"/>
               </a:spcAft>
+              <a:buSzPct val="100000"/>
               <a:buChar char="•"/>
               <a:lnSpc>
                 <a:spcPts val="2200"/>
@@ -5451,10 +5485,12 @@
           </a:bodyPr>
           <a:lstStyle/>
           <a:p>
-            <a:pPr>
+            <a:pPr lvl="0" marL="457200" indent="-228600">
+              <a:buFont typeface="Calibri"/>
               <a:spcAft>
                 <a:spcPts val="1000"/>
               </a:spcAft>
+              <a:buSzPct val="100000"/>
               <a:buChar char="•"/>
               <a:lnSpc>
                 <a:spcPts val="2200"/>
@@ -5471,10 +5507,12 @@
             </a:r>
           </a:p>
           <a:p>
-            <a:pPr>
+            <a:pPr lvl="0" marL="457200" indent="-228600">
+              <a:buFont typeface="Calibri"/>
               <a:spcAft>
                 <a:spcPts val="1000"/>
               </a:spcAft>
+              <a:buSzPct val="100000"/>
               <a:buChar char="•"/>
               <a:lnSpc>
                 <a:spcPts val="2200"/>
@@ -5491,10 +5529,12 @@
             </a:r>
           </a:p>
           <a:p>
-            <a:pPr>
+            <a:pPr lvl="0" marL="457200" indent="-228600">
+              <a:buFont typeface="Calibri"/>
               <a:spcAft>
                 <a:spcPts val="1000"/>
               </a:spcAft>
+              <a:buSzPct val="100000"/>
               <a:buChar char="•"/>
               <a:lnSpc>
                 <a:spcPts val="2200"/>
@@ -5511,10 +5551,12 @@
             </a:r>
           </a:p>
           <a:p>
-            <a:pPr>
+            <a:pPr lvl="0" marL="457200" indent="-228600">
+              <a:buFont typeface="Calibri"/>
               <a:spcAft>
                 <a:spcPts val="1000"/>
               </a:spcAft>
+              <a:buSzPct val="100000"/>
               <a:buChar char="•"/>
               <a:lnSpc>
                 <a:spcPts val="2200"/>
@@ -5650,10 +5692,12 @@
           </a:bodyPr>
           <a:lstStyle/>
           <a:p>
-            <a:pPr>
+            <a:pPr lvl="0" marL="457200" indent="-228600">
+              <a:buFont typeface="Calibri"/>
               <a:spcAft>
                 <a:spcPts val="1000"/>
               </a:spcAft>
+              <a:buSzPct val="100000"/>
               <a:buChar char="•"/>
               <a:lnSpc>
                 <a:spcPts val="2200"/>
@@ -5670,10 +5714,12 @@
             </a:r>
           </a:p>
           <a:p>
-            <a:pPr>
+            <a:pPr lvl="0" marL="457200" indent="-228600">
+              <a:buFont typeface="Calibri"/>
               <a:spcAft>
                 <a:spcPts val="1000"/>
               </a:spcAft>
+              <a:buSzPct val="100000"/>
               <a:buChar char="•"/>
               <a:lnSpc>
                 <a:spcPts val="2200"/>
@@ -5809,10 +5855,12 @@
           </a:bodyPr>
           <a:lstStyle/>
           <a:p>
-            <a:pPr>
+            <a:pPr lvl="0" marL="457200" indent="-228600">
+              <a:buFont typeface="Calibri"/>
               <a:spcAft>
                 <a:spcPts val="1000"/>
               </a:spcAft>
+              <a:buSzPct val="100000"/>
               <a:buChar char="•"/>
               <a:lnSpc>
                 <a:spcPts val="2200"/>
@@ -5829,10 +5877,12 @@
             </a:r>
           </a:p>
           <a:p>
-            <a:pPr>
+            <a:pPr lvl="0" marL="457200" indent="-228600">
+              <a:buFont typeface="Calibri"/>
               <a:spcAft>
                 <a:spcPts val="1000"/>
               </a:spcAft>
+              <a:buSzPct val="100000"/>
               <a:buChar char="•"/>
               <a:lnSpc>
                 <a:spcPts val="2200"/>
@@ -5849,10 +5899,12 @@
             </a:r>
           </a:p>
           <a:p>
-            <a:pPr>
+            <a:pPr lvl="0" marL="457200" indent="-228600">
+              <a:buFont typeface="Calibri"/>
               <a:spcAft>
                 <a:spcPts val="1000"/>
               </a:spcAft>
+              <a:buSzPct val="100000"/>
               <a:buChar char="•"/>
               <a:lnSpc>
                 <a:spcPts val="2200"/>
@@ -5988,10 +6040,12 @@
           </a:bodyPr>
           <a:lstStyle/>
           <a:p>
-            <a:pPr>
+            <a:pPr lvl="0" marL="457200" indent="-228600">
+              <a:buFont typeface="Calibri"/>
               <a:spcAft>
                 <a:spcPts val="1000"/>
               </a:spcAft>
+              <a:buSzPct val="100000"/>
               <a:buChar char="•"/>
               <a:lnSpc>
                 <a:spcPts val="2200"/>
@@ -6008,10 +6062,12 @@
             </a:r>
           </a:p>
           <a:p>
-            <a:pPr>
+            <a:pPr lvl="0" marL="457200" indent="-228600">
+              <a:buFont typeface="Calibri"/>
               <a:spcAft>
                 <a:spcPts val="1000"/>
               </a:spcAft>
+              <a:buSzPct val="100000"/>
               <a:buChar char="•"/>
               <a:lnSpc>
                 <a:spcPts val="2200"/>
